--- a/Weekly_Log/졸작_스테이지_구상_메모용.pptx
+++ b/Weekly_Log/졸작_스테이지_구상_메모용.pptx
@@ -10,6 +10,7 @@
     <p:sldId id="258" r:id="rId4"/>
     <p:sldId id="259" r:id="rId5"/>
     <p:sldId id="260" r:id="rId6"/>
+    <p:sldId id="261" r:id="rId7"/>
   </p:sldIdLst>
   <p:sldSz cx="12192000" cy="6858000"/>
   <p:notesSz cx="6858000" cy="9144000"/>
@@ -108,6 +109,11 @@
       </a:defRPr>
     </a:lvl9pPr>
   </p:defaultTextStyle>
+  <p:extLst>
+    <p:ext uri="{EFAFB233-063F-42B5-8137-9DF3F51BA10A}">
+      <p15:sldGuideLst xmlns:p15="http://schemas.microsoft.com/office/powerpoint/2012/main"/>
+    </p:ext>
+  </p:extLst>
 </p:presentation>
 </file>
 
@@ -258,7 +264,7 @@
           <a:p>
             <a:fld id="{BE917948-0286-4A30-9998-A1AE205B3BE7}" type="datetimeFigureOut">
               <a:rPr lang="ko-KR" altLang="en-US" smtClean="0"/>
-              <a:t>2026-06-07</a:t>
+              <a:t>2026-07-09</a:t>
             </a:fld>
             <a:endParaRPr lang="ko-KR" altLang="en-US"/>
           </a:p>
@@ -456,7 +462,7 @@
           <a:p>
             <a:fld id="{BE917948-0286-4A30-9998-A1AE205B3BE7}" type="datetimeFigureOut">
               <a:rPr lang="ko-KR" altLang="en-US" smtClean="0"/>
-              <a:t>2026-06-07</a:t>
+              <a:t>2026-07-09</a:t>
             </a:fld>
             <a:endParaRPr lang="ko-KR" altLang="en-US"/>
           </a:p>
@@ -664,7 +670,7 @@
           <a:p>
             <a:fld id="{BE917948-0286-4A30-9998-A1AE205B3BE7}" type="datetimeFigureOut">
               <a:rPr lang="ko-KR" altLang="en-US" smtClean="0"/>
-              <a:t>2026-06-07</a:t>
+              <a:t>2026-07-09</a:t>
             </a:fld>
             <a:endParaRPr lang="ko-KR" altLang="en-US"/>
           </a:p>
@@ -862,7 +868,7 @@
           <a:p>
             <a:fld id="{BE917948-0286-4A30-9998-A1AE205B3BE7}" type="datetimeFigureOut">
               <a:rPr lang="ko-KR" altLang="en-US" smtClean="0"/>
-              <a:t>2026-06-07</a:t>
+              <a:t>2026-07-09</a:t>
             </a:fld>
             <a:endParaRPr lang="ko-KR" altLang="en-US"/>
           </a:p>
@@ -1137,7 +1143,7 @@
           <a:p>
             <a:fld id="{BE917948-0286-4A30-9998-A1AE205B3BE7}" type="datetimeFigureOut">
               <a:rPr lang="ko-KR" altLang="en-US" smtClean="0"/>
-              <a:t>2026-06-07</a:t>
+              <a:t>2026-07-09</a:t>
             </a:fld>
             <a:endParaRPr lang="ko-KR" altLang="en-US"/>
           </a:p>
@@ -1402,7 +1408,7 @@
           <a:p>
             <a:fld id="{BE917948-0286-4A30-9998-A1AE205B3BE7}" type="datetimeFigureOut">
               <a:rPr lang="ko-KR" altLang="en-US" smtClean="0"/>
-              <a:t>2026-06-07</a:t>
+              <a:t>2026-07-09</a:t>
             </a:fld>
             <a:endParaRPr lang="ko-KR" altLang="en-US"/>
           </a:p>
@@ -1814,7 +1820,7 @@
           <a:p>
             <a:fld id="{BE917948-0286-4A30-9998-A1AE205B3BE7}" type="datetimeFigureOut">
               <a:rPr lang="ko-KR" altLang="en-US" smtClean="0"/>
-              <a:t>2026-06-07</a:t>
+              <a:t>2026-07-09</a:t>
             </a:fld>
             <a:endParaRPr lang="ko-KR" altLang="en-US"/>
           </a:p>
@@ -1955,7 +1961,7 @@
           <a:p>
             <a:fld id="{BE917948-0286-4A30-9998-A1AE205B3BE7}" type="datetimeFigureOut">
               <a:rPr lang="ko-KR" altLang="en-US" smtClean="0"/>
-              <a:t>2026-06-07</a:t>
+              <a:t>2026-07-09</a:t>
             </a:fld>
             <a:endParaRPr lang="ko-KR" altLang="en-US"/>
           </a:p>
@@ -2068,7 +2074,7 @@
           <a:p>
             <a:fld id="{BE917948-0286-4A30-9998-A1AE205B3BE7}" type="datetimeFigureOut">
               <a:rPr lang="ko-KR" altLang="en-US" smtClean="0"/>
-              <a:t>2026-06-07</a:t>
+              <a:t>2026-07-09</a:t>
             </a:fld>
             <a:endParaRPr lang="ko-KR" altLang="en-US"/>
           </a:p>
@@ -2379,7 +2385,7 @@
           <a:p>
             <a:fld id="{BE917948-0286-4A30-9998-A1AE205B3BE7}" type="datetimeFigureOut">
               <a:rPr lang="ko-KR" altLang="en-US" smtClean="0"/>
-              <a:t>2026-06-07</a:t>
+              <a:t>2026-07-09</a:t>
             </a:fld>
             <a:endParaRPr lang="ko-KR" altLang="en-US"/>
           </a:p>
@@ -2667,7 +2673,7 @@
           <a:p>
             <a:fld id="{BE917948-0286-4A30-9998-A1AE205B3BE7}" type="datetimeFigureOut">
               <a:rPr lang="ko-KR" altLang="en-US" smtClean="0"/>
-              <a:t>2026-06-07</a:t>
+              <a:t>2026-07-09</a:t>
             </a:fld>
             <a:endParaRPr lang="ko-KR" altLang="en-US"/>
           </a:p>
@@ -2908,7 +2914,7 @@
           <a:p>
             <a:fld id="{BE917948-0286-4A30-9998-A1AE205B3BE7}" type="datetimeFigureOut">
               <a:rPr lang="ko-KR" altLang="en-US" smtClean="0"/>
-              <a:t>2026-06-07</a:t>
+              <a:t>2026-07-09</a:t>
             </a:fld>
             <a:endParaRPr lang="ko-KR" altLang="en-US"/>
           </a:p>
@@ -4558,6 +4564,272 @@
     <p:extLst>
       <p:ext uri="{BB962C8B-B14F-4D97-AF65-F5344CB8AC3E}">
         <p14:creationId xmlns:p14="http://schemas.microsoft.com/office/powerpoint/2010/main" val="1376790331"/>
+      </p:ext>
+    </p:extLst>
+  </p:cSld>
+  <p:clrMapOvr>
+    <a:masterClrMapping/>
+  </p:clrMapOvr>
+</p:sld>
+</file>
+
+<file path=ppt/slides/slide6.xml><?xml version="1.0" encoding="utf-8"?>
+<p:sld xmlns:a="http://schemas.openxmlformats.org/drawingml/2006/main" xmlns:r="http://schemas.openxmlformats.org/officeDocument/2006/relationships" xmlns:p="http://schemas.openxmlformats.org/presentationml/2006/main">
+  <p:cSld>
+    <p:spTree>
+      <p:nvGrpSpPr>
+        <p:cNvPr id="1" name="">
+          <a:extLst>
+            <a:ext uri="{FF2B5EF4-FFF2-40B4-BE49-F238E27FC236}">
+              <a16:creationId xmlns:a16="http://schemas.microsoft.com/office/drawing/2014/main" id="{70FE7334-4B3C-F6D5-0DD3-26E642B8D75A}"/>
+            </a:ext>
+          </a:extLst>
+        </p:cNvPr>
+        <p:cNvGrpSpPr/>
+        <p:nvPr/>
+      </p:nvGrpSpPr>
+      <p:grpSpPr>
+        <a:xfrm>
+          <a:off x="0" y="0"/>
+          <a:ext cx="0" cy="0"/>
+          <a:chOff x="0" y="0"/>
+          <a:chExt cx="0" cy="0"/>
+        </a:xfrm>
+      </p:grpSpPr>
+      <p:sp>
+        <p:nvSpPr>
+          <p:cNvPr id="2" name="제목 1">
+            <a:extLst>
+              <a:ext uri="{FF2B5EF4-FFF2-40B4-BE49-F238E27FC236}">
+                <a16:creationId xmlns:a16="http://schemas.microsoft.com/office/drawing/2014/main" id="{BC436710-4AEA-8EA9-24E0-CD746674CDCE}"/>
+              </a:ext>
+            </a:extLst>
+          </p:cNvPr>
+          <p:cNvSpPr>
+            <a:spLocks noGrp="1"/>
+          </p:cNvSpPr>
+          <p:nvPr>
+            <p:ph type="title"/>
+          </p:nvPr>
+        </p:nvSpPr>
+        <p:spPr/>
+        <p:txBody>
+          <a:bodyPr/>
+          <a:lstStyle/>
+          <a:p>
+            <a:r>
+              <a:rPr lang="en-US" altLang="ko-KR" dirty="0"/>
+              <a:t>2</a:t>
+            </a:r>
+            <a:r>
+              <a:rPr lang="ko-KR" altLang="en-US"/>
+              <a:t> </a:t>
+            </a:r>
+            <a:r>
+              <a:rPr lang="ko-KR" altLang="en-US" dirty="0"/>
+              <a:t>스테이지 형태</a:t>
+            </a:r>
+          </a:p>
+        </p:txBody>
+      </p:sp>
+      <p:sp>
+        <p:nvSpPr>
+          <p:cNvPr id="3" name="내용 개체 틀 2">
+            <a:extLst>
+              <a:ext uri="{FF2B5EF4-FFF2-40B4-BE49-F238E27FC236}">
+                <a16:creationId xmlns:a16="http://schemas.microsoft.com/office/drawing/2014/main" id="{BFBCF793-0989-9572-D303-333FF0B8F91A}"/>
+              </a:ext>
+            </a:extLst>
+          </p:cNvPr>
+          <p:cNvSpPr>
+            <a:spLocks noGrp="1"/>
+          </p:cNvSpPr>
+          <p:nvPr>
+            <p:ph idx="1"/>
+          </p:nvPr>
+        </p:nvSpPr>
+        <p:spPr/>
+        <p:txBody>
+          <a:bodyPr/>
+          <a:lstStyle/>
+          <a:p>
+            <a:r>
+              <a:rPr lang="ko-KR" altLang="en-US" dirty="0"/>
+              <a:t>퍼즐</a:t>
+            </a:r>
+          </a:p>
+        </p:txBody>
+      </p:sp>
+      <p:sp>
+        <p:nvSpPr>
+          <p:cNvPr id="5" name="TextBox 4">
+            <a:extLst>
+              <a:ext uri="{FF2B5EF4-FFF2-40B4-BE49-F238E27FC236}">
+                <a16:creationId xmlns:a16="http://schemas.microsoft.com/office/drawing/2014/main" id="{46BCD16E-E8F8-818D-3899-45006424C9D4}"/>
+              </a:ext>
+            </a:extLst>
+          </p:cNvPr>
+          <p:cNvSpPr txBox="1"/>
+          <p:nvPr/>
+        </p:nvSpPr>
+        <p:spPr>
+          <a:xfrm>
+            <a:off x="1213164" y="5703683"/>
+            <a:ext cx="1629624" cy="369332"/>
+          </a:xfrm>
+          <a:prstGeom prst="rect">
+            <a:avLst/>
+          </a:prstGeom>
+          <a:noFill/>
+        </p:spPr>
+        <p:txBody>
+          <a:bodyPr wrap="square" rtlCol="0">
+            <a:spAutoFit/>
+          </a:bodyPr>
+          <a:lstStyle/>
+          <a:p>
+            <a:r>
+              <a:rPr lang="ko-KR" altLang="en-US"/>
+              <a:t>이지</a:t>
+            </a:r>
+          </a:p>
+        </p:txBody>
+      </p:sp>
+      <p:sp>
+        <p:nvSpPr>
+          <p:cNvPr id="6" name="TextBox 5">
+            <a:extLst>
+              <a:ext uri="{FF2B5EF4-FFF2-40B4-BE49-F238E27FC236}">
+                <a16:creationId xmlns:a16="http://schemas.microsoft.com/office/drawing/2014/main" id="{02C05EFC-8E91-4B70-2B35-B51200F8ECD0}"/>
+              </a:ext>
+            </a:extLst>
+          </p:cNvPr>
+          <p:cNvSpPr txBox="1"/>
+          <p:nvPr/>
+        </p:nvSpPr>
+        <p:spPr>
+          <a:xfrm>
+            <a:off x="5549774" y="5703683"/>
+            <a:ext cx="2806575" cy="369332"/>
+          </a:xfrm>
+          <a:prstGeom prst="rect">
+            <a:avLst/>
+          </a:prstGeom>
+          <a:noFill/>
+        </p:spPr>
+        <p:txBody>
+          <a:bodyPr wrap="square" rtlCol="0">
+            <a:spAutoFit/>
+          </a:bodyPr>
+          <a:lstStyle/>
+          <a:p>
+            <a:r>
+              <a:rPr lang="ko-KR" altLang="en-US" dirty="0" err="1"/>
+              <a:t>노말</a:t>
+            </a:r>
+            <a:endParaRPr lang="ko-KR" altLang="en-US" dirty="0"/>
+          </a:p>
+        </p:txBody>
+      </p:sp>
+      <p:sp>
+        <p:nvSpPr>
+          <p:cNvPr id="7" name="TextBox 6">
+            <a:extLst>
+              <a:ext uri="{FF2B5EF4-FFF2-40B4-BE49-F238E27FC236}">
+                <a16:creationId xmlns:a16="http://schemas.microsoft.com/office/drawing/2014/main" id="{6D54F7ED-C285-F87E-E67A-431957F23D7C}"/>
+              </a:ext>
+            </a:extLst>
+          </p:cNvPr>
+          <p:cNvSpPr txBox="1"/>
+          <p:nvPr/>
+        </p:nvSpPr>
+        <p:spPr>
+          <a:xfrm>
+            <a:off x="9949758" y="5839485"/>
+            <a:ext cx="1276539" cy="369332"/>
+          </a:xfrm>
+          <a:prstGeom prst="rect">
+            <a:avLst/>
+          </a:prstGeom>
+          <a:noFill/>
+        </p:spPr>
+        <p:txBody>
+          <a:bodyPr wrap="square" rtlCol="0">
+            <a:spAutoFit/>
+          </a:bodyPr>
+          <a:lstStyle/>
+          <a:p>
+            <a:r>
+              <a:rPr lang="ko-KR" altLang="en-US" dirty="0"/>
+              <a:t>하드</a:t>
+            </a:r>
+          </a:p>
+        </p:txBody>
+      </p:sp>
+      <p:pic>
+        <p:nvPicPr>
+          <p:cNvPr id="9" name="그림 8">
+            <a:extLst>
+              <a:ext uri="{FF2B5EF4-FFF2-40B4-BE49-F238E27FC236}">
+                <a16:creationId xmlns:a16="http://schemas.microsoft.com/office/drawing/2014/main" id="{7CCB591C-C641-DD3F-5239-24D582C8DD90}"/>
+              </a:ext>
+            </a:extLst>
+          </p:cNvPr>
+          <p:cNvPicPr>
+            <a:picLocks noChangeAspect="1"/>
+          </p:cNvPicPr>
+          <p:nvPr/>
+        </p:nvPicPr>
+        <p:blipFill>
+          <a:blip r:embed="rId2"/>
+          <a:stretch>
+            <a:fillRect/>
+          </a:stretch>
+        </p:blipFill>
+        <p:spPr>
+          <a:xfrm>
+            <a:off x="4557000" y="1934008"/>
+            <a:ext cx="2621981" cy="3634738"/>
+          </a:xfrm>
+          <a:prstGeom prst="rect">
+            <a:avLst/>
+          </a:prstGeom>
+        </p:spPr>
+      </p:pic>
+      <p:pic>
+        <p:nvPicPr>
+          <p:cNvPr id="11" name="그림 10">
+            <a:extLst>
+              <a:ext uri="{FF2B5EF4-FFF2-40B4-BE49-F238E27FC236}">
+                <a16:creationId xmlns:a16="http://schemas.microsoft.com/office/drawing/2014/main" id="{EF7993D1-035A-D047-98C8-53B4E3A580BB}"/>
+              </a:ext>
+            </a:extLst>
+          </p:cNvPr>
+          <p:cNvPicPr>
+            <a:picLocks noChangeAspect="1"/>
+          </p:cNvPicPr>
+          <p:nvPr/>
+        </p:nvPicPr>
+        <p:blipFill>
+          <a:blip r:embed="rId3"/>
+          <a:stretch>
+            <a:fillRect/>
+          </a:stretch>
+        </p:blipFill>
+        <p:spPr>
+          <a:xfrm>
+            <a:off x="483597" y="2810164"/>
+            <a:ext cx="2944535" cy="2167954"/>
+          </a:xfrm>
+          <a:prstGeom prst="rect">
+            <a:avLst/>
+          </a:prstGeom>
+        </p:spPr>
+      </p:pic>
+    </p:spTree>
+    <p:extLst>
+      <p:ext uri="{BB962C8B-B14F-4D97-AF65-F5344CB8AC3E}">
+        <p14:creationId xmlns:p14="http://schemas.microsoft.com/office/powerpoint/2010/main" val="396502453"/>
       </p:ext>
     </p:extLst>
   </p:cSld>

--- a/Weekly_Log/졸작_스테이지_구상_메모용.pptx
+++ b/Weekly_Log/졸작_스테이지_구상_메모용.pptx
@@ -264,7 +264,7 @@
           <a:p>
             <a:fld id="{BE917948-0286-4A30-9998-A1AE205B3BE7}" type="datetimeFigureOut">
               <a:rPr lang="ko-KR" altLang="en-US" smtClean="0"/>
-              <a:t>2026-07-09</a:t>
+              <a:t>2026-07-11</a:t>
             </a:fld>
             <a:endParaRPr lang="ko-KR" altLang="en-US"/>
           </a:p>
@@ -462,7 +462,7 @@
           <a:p>
             <a:fld id="{BE917948-0286-4A30-9998-A1AE205B3BE7}" type="datetimeFigureOut">
               <a:rPr lang="ko-KR" altLang="en-US" smtClean="0"/>
-              <a:t>2026-07-09</a:t>
+              <a:t>2026-07-11</a:t>
             </a:fld>
             <a:endParaRPr lang="ko-KR" altLang="en-US"/>
           </a:p>
@@ -670,7 +670,7 @@
           <a:p>
             <a:fld id="{BE917948-0286-4A30-9998-A1AE205B3BE7}" type="datetimeFigureOut">
               <a:rPr lang="ko-KR" altLang="en-US" smtClean="0"/>
-              <a:t>2026-07-09</a:t>
+              <a:t>2026-07-11</a:t>
             </a:fld>
             <a:endParaRPr lang="ko-KR" altLang="en-US"/>
           </a:p>
@@ -868,7 +868,7 @@
           <a:p>
             <a:fld id="{BE917948-0286-4A30-9998-A1AE205B3BE7}" type="datetimeFigureOut">
               <a:rPr lang="ko-KR" altLang="en-US" smtClean="0"/>
-              <a:t>2026-07-09</a:t>
+              <a:t>2026-07-11</a:t>
             </a:fld>
             <a:endParaRPr lang="ko-KR" altLang="en-US"/>
           </a:p>
@@ -1143,7 +1143,7 @@
           <a:p>
             <a:fld id="{BE917948-0286-4A30-9998-A1AE205B3BE7}" type="datetimeFigureOut">
               <a:rPr lang="ko-KR" altLang="en-US" smtClean="0"/>
-              <a:t>2026-07-09</a:t>
+              <a:t>2026-07-11</a:t>
             </a:fld>
             <a:endParaRPr lang="ko-KR" altLang="en-US"/>
           </a:p>
@@ -1408,7 +1408,7 @@
           <a:p>
             <a:fld id="{BE917948-0286-4A30-9998-A1AE205B3BE7}" type="datetimeFigureOut">
               <a:rPr lang="ko-KR" altLang="en-US" smtClean="0"/>
-              <a:t>2026-07-09</a:t>
+              <a:t>2026-07-11</a:t>
             </a:fld>
             <a:endParaRPr lang="ko-KR" altLang="en-US"/>
           </a:p>
@@ -1820,7 +1820,7 @@
           <a:p>
             <a:fld id="{BE917948-0286-4A30-9998-A1AE205B3BE7}" type="datetimeFigureOut">
               <a:rPr lang="ko-KR" altLang="en-US" smtClean="0"/>
-              <a:t>2026-07-09</a:t>
+              <a:t>2026-07-11</a:t>
             </a:fld>
             <a:endParaRPr lang="ko-KR" altLang="en-US"/>
           </a:p>
@@ -1961,7 +1961,7 @@
           <a:p>
             <a:fld id="{BE917948-0286-4A30-9998-A1AE205B3BE7}" type="datetimeFigureOut">
               <a:rPr lang="ko-KR" altLang="en-US" smtClean="0"/>
-              <a:t>2026-07-09</a:t>
+              <a:t>2026-07-11</a:t>
             </a:fld>
             <a:endParaRPr lang="ko-KR" altLang="en-US"/>
           </a:p>
@@ -2074,7 +2074,7 @@
           <a:p>
             <a:fld id="{BE917948-0286-4A30-9998-A1AE205B3BE7}" type="datetimeFigureOut">
               <a:rPr lang="ko-KR" altLang="en-US" smtClean="0"/>
-              <a:t>2026-07-09</a:t>
+              <a:t>2026-07-11</a:t>
             </a:fld>
             <a:endParaRPr lang="ko-KR" altLang="en-US"/>
           </a:p>
@@ -2385,7 +2385,7 @@
           <a:p>
             <a:fld id="{BE917948-0286-4A30-9998-A1AE205B3BE7}" type="datetimeFigureOut">
               <a:rPr lang="ko-KR" altLang="en-US" smtClean="0"/>
-              <a:t>2026-07-09</a:t>
+              <a:t>2026-07-11</a:t>
             </a:fld>
             <a:endParaRPr lang="ko-KR" altLang="en-US"/>
           </a:p>
@@ -2673,7 +2673,7 @@
           <a:p>
             <a:fld id="{BE917948-0286-4A30-9998-A1AE205B3BE7}" type="datetimeFigureOut">
               <a:rPr lang="ko-KR" altLang="en-US" smtClean="0"/>
-              <a:t>2026-07-09</a:t>
+              <a:t>2026-07-11</a:t>
             </a:fld>
             <a:endParaRPr lang="ko-KR" altLang="en-US"/>
           </a:p>
@@ -2914,7 +2914,7 @@
           <a:p>
             <a:fld id="{BE917948-0286-4A30-9998-A1AE205B3BE7}" type="datetimeFigureOut">
               <a:rPr lang="ko-KR" altLang="en-US" smtClean="0"/>
-              <a:t>2026-07-09</a:t>
+              <a:t>2026-07-11</a:t>
             </a:fld>
             <a:endParaRPr lang="ko-KR" altLang="en-US"/>
           </a:p>
@@ -4820,6 +4820,42 @@
           <a:xfrm>
             <a:off x="483597" y="2810164"/>
             <a:ext cx="2944535" cy="2167954"/>
+          </a:xfrm>
+          <a:prstGeom prst="rect">
+            <a:avLst/>
+          </a:prstGeom>
+        </p:spPr>
+      </p:pic>
+      <p:pic>
+        <p:nvPicPr>
+          <p:cNvPr id="8" name="그림 7">
+            <a:extLst>
+              <a:ext uri="{FF2B5EF4-FFF2-40B4-BE49-F238E27FC236}">
+                <a16:creationId xmlns:a16="http://schemas.microsoft.com/office/drawing/2014/main" id="{382A5F21-522A-FD54-8C84-C225066B6A1F}"/>
+              </a:ext>
+            </a:extLst>
+          </p:cNvPr>
+          <p:cNvPicPr>
+            <a:picLocks noChangeAspect="1"/>
+          </p:cNvPicPr>
+          <p:nvPr/>
+        </p:nvPicPr>
+        <p:blipFill>
+          <a:blip r:embed="rId4">
+            <a:extLst>
+              <a:ext uri="{28A0092B-C50C-407E-A947-70E740481C1C}">
+                <a14:useLocalDpi xmlns:a14="http://schemas.microsoft.com/office/drawing/2010/main" val="0"/>
+              </a:ext>
+            </a:extLst>
+          </a:blip>
+          <a:stretch>
+            <a:fillRect/>
+          </a:stretch>
+        </p:blipFill>
+        <p:spPr>
+          <a:xfrm>
+            <a:off x="7730190" y="2362685"/>
+            <a:ext cx="4101592" cy="2866971"/>
           </a:xfrm>
           <a:prstGeom prst="rect">
             <a:avLst/>
